--- a/BUG-002.pptx
+++ b/BUG-002.pptx
@@ -203,7 +203,7 @@
           <a:p>
             <a:fld id="{1AE07002-56FB-41C6-A6F7-CFD1D461F481}" type="datetimeFigureOut">
               <a:rPr lang="pt-BR" smtClean="0"/>
-              <a:t>10/10/2026</a:t>
+              <a:t>21/10/2026</a:t>
             </a:fld>
             <a:endParaRPr lang="pt-BR"/>
           </a:p>
@@ -1276,7 +1276,7 @@
           <a:p>
             <a:fld id="{74017B93-A402-4F37-AF24-558FA750DB0C}" type="datetimeFigureOut">
               <a:rPr lang="pt-BR" smtClean="0"/>
-              <a:t>10/10/2026</a:t>
+              <a:t>21/10/2026</a:t>
             </a:fld>
             <a:endParaRPr lang="pt-BR"/>
           </a:p>
@@ -1527,7 +1527,7 @@
           <a:p>
             <a:fld id="{74017B93-A402-4F37-AF24-558FA750DB0C}" type="datetimeFigureOut">
               <a:rPr lang="pt-BR" smtClean="0"/>
-              <a:t>10/10/2026</a:t>
+              <a:t>21/10/2026</a:t>
             </a:fld>
             <a:endParaRPr lang="pt-BR"/>
           </a:p>
@@ -1841,7 +1841,7 @@
           <a:p>
             <a:fld id="{74017B93-A402-4F37-AF24-558FA750DB0C}" type="datetimeFigureOut">
               <a:rPr lang="pt-BR" smtClean="0"/>
-              <a:t>10/10/2026</a:t>
+              <a:t>21/10/2026</a:t>
             </a:fld>
             <a:endParaRPr lang="pt-BR"/>
           </a:p>
@@ -2182,7 +2182,7 @@
           <a:p>
             <a:fld id="{74017B93-A402-4F37-AF24-558FA750DB0C}" type="datetimeFigureOut">
               <a:rPr lang="pt-BR" smtClean="0"/>
-              <a:t>10/10/2026</a:t>
+              <a:t>21/10/2026</a:t>
             </a:fld>
             <a:endParaRPr lang="pt-BR"/>
           </a:p>
@@ -2496,7 +2496,7 @@
           <a:p>
             <a:fld id="{74017B93-A402-4F37-AF24-558FA750DB0C}" type="datetimeFigureOut">
               <a:rPr lang="pt-BR" smtClean="0"/>
-              <a:t>10/10/2026</a:t>
+              <a:t>21/10/2026</a:t>
             </a:fld>
             <a:endParaRPr lang="pt-BR"/>
           </a:p>
@@ -2889,7 +2889,7 @@
           <a:p>
             <a:fld id="{74017B93-A402-4F37-AF24-558FA750DB0C}" type="datetimeFigureOut">
               <a:rPr lang="pt-BR" smtClean="0"/>
-              <a:t>10/10/2026</a:t>
+              <a:t>21/10/2026</a:t>
             </a:fld>
             <a:endParaRPr lang="pt-BR"/>
           </a:p>
@@ -3059,7 +3059,7 @@
           <a:p>
             <a:fld id="{74017B93-A402-4F37-AF24-558FA750DB0C}" type="datetimeFigureOut">
               <a:rPr lang="pt-BR" smtClean="0"/>
-              <a:t>10/10/2026</a:t>
+              <a:t>21/10/2026</a:t>
             </a:fld>
             <a:endParaRPr lang="pt-BR"/>
           </a:p>
@@ -3239,7 +3239,7 @@
           <a:p>
             <a:fld id="{74017B93-A402-4F37-AF24-558FA750DB0C}" type="datetimeFigureOut">
               <a:rPr lang="pt-BR" smtClean="0"/>
-              <a:t>10/10/2026</a:t>
+              <a:t>21/10/2026</a:t>
             </a:fld>
             <a:endParaRPr lang="pt-BR"/>
           </a:p>
@@ -3415,7 +3415,7 @@
           <a:p>
             <a:fld id="{74017B93-A402-4F37-AF24-558FA750DB0C}" type="datetimeFigureOut">
               <a:rPr lang="pt-BR" smtClean="0"/>
-              <a:t>10/10/2026</a:t>
+              <a:t>21/10/2026</a:t>
             </a:fld>
             <a:endParaRPr lang="pt-BR"/>
           </a:p>
@@ -3662,7 +3662,7 @@
           <a:p>
             <a:fld id="{74017B93-A402-4F37-AF24-558FA750DB0C}" type="datetimeFigureOut">
               <a:rPr lang="pt-BR" smtClean="0"/>
-              <a:t>10/10/2026</a:t>
+              <a:t>21/10/2026</a:t>
             </a:fld>
             <a:endParaRPr lang="pt-BR"/>
           </a:p>
@@ -3894,7 +3894,7 @@
           <a:p>
             <a:fld id="{74017B93-A402-4F37-AF24-558FA750DB0C}" type="datetimeFigureOut">
               <a:rPr lang="pt-BR" smtClean="0"/>
-              <a:t>10/10/2026</a:t>
+              <a:t>21/10/2026</a:t>
             </a:fld>
             <a:endParaRPr lang="pt-BR"/>
           </a:p>
@@ -4268,7 +4268,7 @@
           <a:p>
             <a:fld id="{74017B93-A402-4F37-AF24-558FA750DB0C}" type="datetimeFigureOut">
               <a:rPr lang="pt-BR" smtClean="0"/>
-              <a:t>10/10/2026</a:t>
+              <a:t>21/10/2026</a:t>
             </a:fld>
             <a:endParaRPr lang="pt-BR"/>
           </a:p>
@@ -4391,7 +4391,7 @@
           <a:p>
             <a:fld id="{74017B93-A402-4F37-AF24-558FA750DB0C}" type="datetimeFigureOut">
               <a:rPr lang="pt-BR" smtClean="0"/>
-              <a:t>10/10/2026</a:t>
+              <a:t>21/10/2026</a:t>
             </a:fld>
             <a:endParaRPr lang="pt-BR"/>
           </a:p>
@@ -4486,7 +4486,7 @@
           <a:p>
             <a:fld id="{74017B93-A402-4F37-AF24-558FA750DB0C}" type="datetimeFigureOut">
               <a:rPr lang="pt-BR" smtClean="0"/>
-              <a:t>10/10/2026</a:t>
+              <a:t>21/10/2026</a:t>
             </a:fld>
             <a:endParaRPr lang="pt-BR"/>
           </a:p>
@@ -4741,7 +4741,7 @@
           <a:p>
             <a:fld id="{74017B93-A402-4F37-AF24-558FA750DB0C}" type="datetimeFigureOut">
               <a:rPr lang="pt-BR" smtClean="0"/>
-              <a:t>10/10/2026</a:t>
+              <a:t>21/10/2026</a:t>
             </a:fld>
             <a:endParaRPr lang="pt-BR"/>
           </a:p>
@@ -5004,7 +5004,7 @@
           <a:p>
             <a:fld id="{74017B93-A402-4F37-AF24-558FA750DB0C}" type="datetimeFigureOut">
               <a:rPr lang="pt-BR" smtClean="0"/>
-              <a:t>10/10/2026</a:t>
+              <a:t>21/10/2026</a:t>
             </a:fld>
             <a:endParaRPr lang="pt-BR"/>
           </a:p>
@@ -5747,7 +5747,7 @@
           <a:p>
             <a:fld id="{74017B93-A402-4F37-AF24-558FA750DB0C}" type="datetimeFigureOut">
               <a:rPr lang="pt-BR" smtClean="0"/>
-              <a:t>10/10/2026</a:t>
+              <a:t>21/10/2026</a:t>
             </a:fld>
             <a:endParaRPr lang="pt-BR"/>
           </a:p>
@@ -7135,8 +7135,8 @@
         </p:blipFill>
         <p:spPr>
           <a:xfrm>
-            <a:off x="1746681" y="1919578"/>
-            <a:ext cx="8698637" cy="4403761"/>
+            <a:off x="2997878" y="1860549"/>
+            <a:ext cx="6196243" cy="3136902"/>
           </a:xfrm>
           <a:prstGeom prst="rect">
             <a:avLst/>
